--- a/screenshots/MyToDoList screenshots.pptx
+++ b/screenshots/MyToDoList screenshots.pptx
@@ -108,6 +108,11 @@
       </a:defRPr>
     </a:lvl9pPr>
   </p:defaultTextStyle>
+  <p:extLst>
+    <p:ext uri="{EFAFB233-063F-42B5-8137-9DF3F51BA10A}">
+      <p15:sldGuideLst xmlns:p15="http://schemas.microsoft.com/office/powerpoint/2012/main"/>
+    </p:ext>
+  </p:extLst>
 </p:presentation>
 </file>
 
@@ -738,7 +743,7 @@
           <a:p>
             <a:fld id="{A5964A2F-746A-48F0-9EDE-3F8DE93DF9D0}" type="datetimeFigureOut">
               <a:rPr lang="en-US" smtClean="0"/>
-              <a:t>1/6/2026</a:t>
+              <a:t>1/7/2026</a:t>
             </a:fld>
             <a:endParaRPr lang="en-US"/>
           </a:p>
@@ -1019,7 +1024,7 @@
           <a:p>
             <a:fld id="{A5964A2F-746A-48F0-9EDE-3F8DE93DF9D0}" type="datetimeFigureOut">
               <a:rPr lang="en-US" smtClean="0"/>
-              <a:t>1/6/2026</a:t>
+              <a:t>1/7/2026</a:t>
             </a:fld>
             <a:endParaRPr lang="en-US"/>
           </a:p>
@@ -1211,7 +1216,7 @@
           <a:p>
             <a:fld id="{A5964A2F-746A-48F0-9EDE-3F8DE93DF9D0}" type="datetimeFigureOut">
               <a:rPr lang="en-US" smtClean="0"/>
-              <a:t>1/6/2026</a:t>
+              <a:t>1/7/2026</a:t>
             </a:fld>
             <a:endParaRPr lang="en-US"/>
           </a:p>
@@ -1472,7 +1477,7 @@
           <a:p>
             <a:fld id="{A5964A2F-746A-48F0-9EDE-3F8DE93DF9D0}" type="datetimeFigureOut">
               <a:rPr lang="en-US" smtClean="0"/>
-              <a:t>1/6/2026</a:t>
+              <a:t>1/7/2026</a:t>
             </a:fld>
             <a:endParaRPr lang="en-US"/>
           </a:p>
@@ -1898,7 +1903,7 @@
           <a:p>
             <a:fld id="{A5964A2F-746A-48F0-9EDE-3F8DE93DF9D0}" type="datetimeFigureOut">
               <a:rPr lang="en-US" smtClean="0"/>
-              <a:t>1/6/2026</a:t>
+              <a:t>1/7/2026</a:t>
             </a:fld>
             <a:endParaRPr lang="en-US"/>
           </a:p>
@@ -2444,7 +2449,7 @@
           <a:p>
             <a:fld id="{A5964A2F-746A-48F0-9EDE-3F8DE93DF9D0}" type="datetimeFigureOut">
               <a:rPr lang="en-US" smtClean="0"/>
-              <a:t>1/6/2026</a:t>
+              <a:t>1/7/2026</a:t>
             </a:fld>
             <a:endParaRPr lang="en-US"/>
           </a:p>
@@ -3275,7 +3280,7 @@
           <a:p>
             <a:fld id="{A5964A2F-746A-48F0-9EDE-3F8DE93DF9D0}" type="datetimeFigureOut">
               <a:rPr lang="en-US" smtClean="0"/>
-              <a:t>1/6/2026</a:t>
+              <a:t>1/7/2026</a:t>
             </a:fld>
             <a:endParaRPr lang="en-US"/>
           </a:p>
@@ -3445,7 +3450,7 @@
           <a:p>
             <a:fld id="{A5964A2F-746A-48F0-9EDE-3F8DE93DF9D0}" type="datetimeFigureOut">
               <a:rPr lang="en-US" smtClean="0"/>
-              <a:t>1/6/2026</a:t>
+              <a:t>1/7/2026</a:t>
             </a:fld>
             <a:endParaRPr lang="en-US"/>
           </a:p>
@@ -3625,7 +3630,7 @@
           <a:p>
             <a:fld id="{A5964A2F-746A-48F0-9EDE-3F8DE93DF9D0}" type="datetimeFigureOut">
               <a:rPr lang="en-US" smtClean="0"/>
-              <a:t>1/6/2026</a:t>
+              <a:t>1/7/2026</a:t>
             </a:fld>
             <a:endParaRPr lang="en-US"/>
           </a:p>
@@ -3795,7 +3800,7 @@
           <a:p>
             <a:fld id="{A5964A2F-746A-48F0-9EDE-3F8DE93DF9D0}" type="datetimeFigureOut">
               <a:rPr lang="en-US" smtClean="0"/>
-              <a:t>1/6/2026</a:t>
+              <a:t>1/7/2026</a:t>
             </a:fld>
             <a:endParaRPr lang="en-US"/>
           </a:p>
@@ -4052,7 +4057,7 @@
           <a:p>
             <a:fld id="{A5964A2F-746A-48F0-9EDE-3F8DE93DF9D0}" type="datetimeFigureOut">
               <a:rPr lang="en-US" smtClean="0"/>
-              <a:t>1/6/2026</a:t>
+              <a:t>1/7/2026</a:t>
             </a:fld>
             <a:endParaRPr lang="en-US"/>
           </a:p>
@@ -4284,7 +4289,7 @@
           <a:p>
             <a:fld id="{A5964A2F-746A-48F0-9EDE-3F8DE93DF9D0}" type="datetimeFigureOut">
               <a:rPr lang="en-US" smtClean="0"/>
-              <a:t>1/6/2026</a:t>
+              <a:t>1/7/2026</a:t>
             </a:fld>
             <a:endParaRPr lang="en-US"/>
           </a:p>
@@ -4677,7 +4682,7 @@
           <a:p>
             <a:fld id="{A5964A2F-746A-48F0-9EDE-3F8DE93DF9D0}" type="datetimeFigureOut">
               <a:rPr lang="en-US" smtClean="0"/>
-              <a:t>1/6/2026</a:t>
+              <a:t>1/7/2026</a:t>
             </a:fld>
             <a:endParaRPr lang="en-US"/>
           </a:p>
@@ -4795,7 +4800,7 @@
           <a:p>
             <a:fld id="{A5964A2F-746A-48F0-9EDE-3F8DE93DF9D0}" type="datetimeFigureOut">
               <a:rPr lang="en-US" smtClean="0"/>
-              <a:t>1/6/2026</a:t>
+              <a:t>1/7/2026</a:t>
             </a:fld>
             <a:endParaRPr lang="en-US"/>
           </a:p>
@@ -4890,7 +4895,7 @@
           <a:p>
             <a:fld id="{A5964A2F-746A-48F0-9EDE-3F8DE93DF9D0}" type="datetimeFigureOut">
               <a:rPr lang="en-US" smtClean="0"/>
-              <a:t>1/6/2026</a:t>
+              <a:t>1/7/2026</a:t>
             </a:fld>
             <a:endParaRPr lang="en-US"/>
           </a:p>
@@ -5163,7 +5168,7 @@
           <a:p>
             <a:fld id="{A5964A2F-746A-48F0-9EDE-3F8DE93DF9D0}" type="datetimeFigureOut">
               <a:rPr lang="en-US" smtClean="0"/>
-              <a:t>1/6/2026</a:t>
+              <a:t>1/7/2026</a:t>
             </a:fld>
             <a:endParaRPr lang="en-US"/>
           </a:p>
@@ -5444,7 +5449,7 @@
           <a:p>
             <a:fld id="{A5964A2F-746A-48F0-9EDE-3F8DE93DF9D0}" type="datetimeFigureOut">
               <a:rPr lang="en-US" smtClean="0"/>
-              <a:t>1/6/2026</a:t>
+              <a:t>1/7/2026</a:t>
             </a:fld>
             <a:endParaRPr lang="en-US"/>
           </a:p>
@@ -5684,7 +5689,7 @@
           <a:p>
             <a:fld id="{A5964A2F-746A-48F0-9EDE-3F8DE93DF9D0}" type="datetimeFigureOut">
               <a:rPr lang="en-US" smtClean="0"/>
-              <a:t>1/6/2026</a:t>
+              <a:t>1/7/2026</a:t>
             </a:fld>
             <a:endParaRPr lang="en-US"/>
           </a:p>
@@ -6774,14 +6779,13 @@
               </a:ext>
             </a:extLst>
           </a:blip>
-          <a:stretch>
-            <a:fillRect/>
-          </a:stretch>
+          <a:srcRect/>
+          <a:stretch/>
         </p:blipFill>
         <p:spPr>
           <a:xfrm>
             <a:off x="2020824" y="374904"/>
-            <a:ext cx="2748686" cy="6108192"/>
+            <a:ext cx="2748686" cy="6108191"/>
           </a:xfrm>
           <a:prstGeom prst="rect">
             <a:avLst/>
@@ -6810,14 +6814,13 @@
               </a:ext>
             </a:extLst>
           </a:blip>
-          <a:stretch>
-            <a:fillRect/>
-          </a:stretch>
+          <a:srcRect/>
+          <a:stretch/>
         </p:blipFill>
         <p:spPr>
           <a:xfrm>
             <a:off x="7424928" y="374904"/>
-            <a:ext cx="2748686" cy="6108192"/>
+            <a:ext cx="2748686" cy="6108191"/>
           </a:xfrm>
           <a:prstGeom prst="rect">
             <a:avLst/>
